--- a/LabBook_10.pptx
+++ b/LabBook_10.pptx
@@ -233,7 +233,7 @@
           <a:p>
             <a:fld id="{8438F8DC-35B0-48E6-A86E-42F1F08DD00F}" type="datetimeFigureOut">
               <a:rPr lang="es-ES" smtClean="0"/>
-              <a:t>16/02/2026</a:t>
+              <a:t>15/03/2026</a:t>
             </a:fld>
             <a:endParaRPr lang="es-ES"/>
           </a:p>
@@ -410,7 +410,7 @@
           <a:p>
             <a:fld id="{FACBDC12-F39B-4B97-8F4D-6734F9D366FF}" type="datetimeFigureOut">
               <a:rPr lang="es-ES" smtClean="0"/>
-              <a:t>16/02/2026</a:t>
+              <a:t>15/03/2026</a:t>
             </a:fld>
             <a:endParaRPr lang="es-ES"/>
           </a:p>
@@ -5132,8 +5132,8 @@
         </p:nvSpPr>
         <p:spPr>
           <a:xfrm>
-            <a:off x="609441" y="4860334"/>
-            <a:ext cx="11199971" cy="1200329"/>
+            <a:off x="545015" y="4419600"/>
+            <a:ext cx="11199971" cy="1569660"/>
           </a:xfrm>
           <a:prstGeom prst="rect">
             <a:avLst/>
@@ -5157,40 +5157,17 @@
           <a:p>
             <a:pPr algn="just"/>
             <a:r>
-              <a:rPr lang="en-US" sz="1200" dirty="0">
-                <a:latin typeface="Arial" panose="020B0604020202020204" pitchFamily="34" charset="0"/>
-                <a:cs typeface="Arial" panose="020B0604020202020204" pitchFamily="34" charset="0"/>
-              </a:rPr>
-              <a:t>Document all your results (neff, plot fields </a:t>
-            </a:r>
-            <a:r>
-              <a:rPr lang="en-US" sz="1200">
-                <a:latin typeface="Arial" panose="020B0604020202020204" pitchFamily="34" charset="0"/>
-                <a:cs typeface="Arial" panose="020B0604020202020204" pitchFamily="34" charset="0"/>
-              </a:rPr>
-              <a:t>of different modes, </a:t>
-            </a:r>
-            <a:r>
-              <a:rPr lang="en-US" sz="1200" dirty="0">
-                <a:latin typeface="Arial" panose="020B0604020202020204" pitchFamily="34" charset="0"/>
-                <a:cs typeface="Arial" panose="020B0604020202020204" pitchFamily="34" charset="0"/>
-              </a:rPr>
-              <a:t>comparison between </a:t>
-            </a:r>
-            <a:r>
-              <a:rPr lang="en-US" sz="1200">
-                <a:latin typeface="Arial" panose="020B0604020202020204" pitchFamily="34" charset="0"/>
-                <a:cs typeface="Arial" panose="020B0604020202020204" pitchFamily="34" charset="0"/>
-              </a:rPr>
-              <a:t>different polarizations…)</a:t>
-            </a:r>
-            <a:endParaRPr lang="en-US" sz="1200" dirty="0">
-              <a:latin typeface="Arial" panose="020B0604020202020204" pitchFamily="34" charset="0"/>
-              <a:cs typeface="Arial" panose="020B0604020202020204" pitchFamily="34" charset="0"/>
-            </a:endParaRPr>
-          </a:p>
-          <a:p>
-            <a:pPr algn="just"/>
+              <a:rPr lang="en-US" sz="1200" dirty="0"/>
+              <a:t>For a deep waveguide with width 1.2 µm at λ = 1.55 µm, several guided modes are supported. The fundamental mode shows the highest effective index, which indicates the strongest confinement inside the core. Higher-order modes present lower </a:t>
+            </a:r>
+            <a:r>
+              <a:rPr lang="en-US" sz="1200" dirty="0" err="1"/>
+              <a:t>neff</a:t>
+            </a:r>
+            <a:r>
+              <a:rPr lang="en-US" sz="1200" dirty="0"/>
+              <a:t> values because a larger fraction of the field extends into the cladding. The field profiles confirm that the fundamental mode is more concentrated in the waveguide core, while higher-order modes are less confined and more spread out. In addition, the different polarizations show different effective indices, proving that the waveguide is birefringent and that TE and TM modes propagate differently for the same geometry.</a:t>
+            </a:r>
             <a:endParaRPr lang="en-US" sz="1200" dirty="0">
               <a:latin typeface="Arial" panose="020B0604020202020204" pitchFamily="34" charset="0"/>
               <a:cs typeface="Arial" panose="020B0604020202020204" pitchFamily="34" charset="0"/>
@@ -5436,7 +5413,7 @@
         <p:spPr>
           <a:xfrm>
             <a:off x="609441" y="4860334"/>
-            <a:ext cx="11199971" cy="1200329"/>
+            <a:ext cx="11199971" cy="1384995"/>
           </a:xfrm>
           <a:prstGeom prst="rect">
             <a:avLst/>
@@ -5460,43 +5437,25 @@
           <a:p>
             <a:pPr algn="just"/>
             <a:r>
-              <a:rPr lang="en-US" sz="1200" dirty="0">
-                <a:latin typeface="Arial" panose="020B0604020202020204" pitchFamily="34" charset="0"/>
-                <a:cs typeface="Arial" panose="020B0604020202020204" pitchFamily="34" charset="0"/>
-              </a:rPr>
-              <a:t>Comment results (neff changes this way with wavelength, comparison between different waveguide cross-sections …</a:t>
-            </a:r>
-            <a:r>
-              <a:rPr lang="en-US" sz="1200" dirty="0" err="1">
-                <a:latin typeface="Arial" panose="020B0604020202020204" pitchFamily="34" charset="0"/>
-                <a:cs typeface="Arial" panose="020B0604020202020204" pitchFamily="34" charset="0"/>
-              </a:rPr>
-              <a:t>etc</a:t>
-            </a:r>
-            <a:r>
-              <a:rPr lang="en-US" sz="1200" dirty="0">
-                <a:latin typeface="Arial" panose="020B0604020202020204" pitchFamily="34" charset="0"/>
-                <a:cs typeface="Arial" panose="020B0604020202020204" pitchFamily="34" charset="0"/>
-              </a:rPr>
-              <a:t>)</a:t>
-            </a:r>
-          </a:p>
-          <a:p>
-            <a:pPr algn="just"/>
-            <a:endParaRPr lang="en-US" sz="1200" dirty="0">
-              <a:latin typeface="Arial" panose="020B0604020202020204" pitchFamily="34" charset="0"/>
-              <a:cs typeface="Arial" panose="020B0604020202020204" pitchFamily="34" charset="0"/>
-            </a:endParaRPr>
-          </a:p>
-          <a:p>
-            <a:pPr algn="just"/>
-            <a:endParaRPr lang="en-US" sz="1200" dirty="0">
-              <a:latin typeface="Arial" panose="020B0604020202020204" pitchFamily="34" charset="0"/>
-              <a:cs typeface="Arial" panose="020B0604020202020204" pitchFamily="34" charset="0"/>
-            </a:endParaRPr>
-          </a:p>
-          <a:p>
-            <a:pPr algn="just"/>
+              <a:rPr lang="en-US" sz="1200" dirty="0"/>
+              <a:t>For both shallow and deep waveguides, the effective index decreases as the wavelength increases from 1.50 µm to 1.60 µm. This behavior is expected because at longer wavelengths the optical field becomes less confined in the core and extends more into the cladding, reducing </a:t>
+            </a:r>
+            <a:r>
+              <a:rPr lang="en-US" sz="1200" dirty="0" err="1"/>
+              <a:t>neff</a:t>
+            </a:r>
+            <a:r>
+              <a:rPr lang="en-US" sz="1200" dirty="0"/>
+              <a:t>. The shallow waveguide shows higher </a:t>
+            </a:r>
+            <a:r>
+              <a:rPr lang="en-US" sz="1200" dirty="0" err="1"/>
+              <a:t>neff</a:t>
+            </a:r>
+            <a:r>
+              <a:rPr lang="en-US" sz="1200" dirty="0"/>
+              <a:t> values for the upper modes than the deep waveguide in the plotted comparison, while the deep waveguide shows lower values for some higher-order modes. In all cases, mode 0 remains the most confined mode and therefore has the highest effective index. The separation between modes also shows that the waveguide cross-section strongly affects modal confinement and dispersion behavior.</a:t>
+            </a:r>
             <a:endParaRPr lang="en-US" sz="1200" dirty="0">
               <a:latin typeface="Arial" panose="020B0604020202020204" pitchFamily="34" charset="0"/>
               <a:cs typeface="Arial" panose="020B0604020202020204" pitchFamily="34" charset="0"/>
@@ -5572,57 +5531,6 @@
       </p:sp>
       <p:sp>
         <p:nvSpPr>
-          <p:cNvPr id="6" name="CuadroTexto 5">
-            <a:extLst>
-              <a:ext uri="{FF2B5EF4-FFF2-40B4-BE49-F238E27FC236}">
-                <a16:creationId xmlns:a16="http://schemas.microsoft.com/office/drawing/2014/main" id="{3C4E7A47-20E2-3C27-D841-5A665642F6E2}"/>
-              </a:ext>
-            </a:extLst>
-          </p:cNvPr>
-          <p:cNvSpPr txBox="1"/>
-          <p:nvPr/>
-        </p:nvSpPr>
-        <p:spPr>
-          <a:xfrm>
-            <a:off x="2285455" y="2671278"/>
-            <a:ext cx="1980542" cy="923330"/>
-          </a:xfrm>
-          <a:prstGeom prst="rect">
-            <a:avLst/>
-          </a:prstGeom>
-          <a:noFill/>
-        </p:spPr>
-        <p:txBody>
-          <a:bodyPr wrap="none" rtlCol="0">
-            <a:spAutoFit/>
-          </a:bodyPr>
-          <a:lstStyle/>
-          <a:p>
-            <a:pPr algn="ctr"/>
-            <a:r>
-              <a:rPr lang="en-US" b="1" dirty="0"/>
-              <a:t>shallow</a:t>
-            </a:r>
-            <a:r>
-              <a:rPr lang="en-US" dirty="0"/>
-              <a:t> waveguide</a:t>
-            </a:r>
-          </a:p>
-          <a:p>
-            <a:pPr algn="ctr"/>
-            <a:endParaRPr lang="en-US" dirty="0"/>
-          </a:p>
-          <a:p>
-            <a:pPr algn="ctr"/>
-            <a:r>
-              <a:rPr lang="en-US" dirty="0"/>
-              <a:t>Paste plot here</a:t>
-            </a:r>
-          </a:p>
-        </p:txBody>
-      </p:sp>
-      <p:sp>
-        <p:nvSpPr>
           <p:cNvPr id="7" name="Rectángulo 6">
             <a:extLst>
               <a:ext uri="{FF2B5EF4-FFF2-40B4-BE49-F238E27FC236}">
@@ -5675,57 +5583,6 @@
       </p:sp>
       <p:sp>
         <p:nvSpPr>
-          <p:cNvPr id="8" name="CuadroTexto 7">
-            <a:extLst>
-              <a:ext uri="{FF2B5EF4-FFF2-40B4-BE49-F238E27FC236}">
-                <a16:creationId xmlns:a16="http://schemas.microsoft.com/office/drawing/2014/main" id="{CD9C65D4-5494-F5CE-1094-CB0A32C33876}"/>
-              </a:ext>
-            </a:extLst>
-          </p:cNvPr>
-          <p:cNvSpPr txBox="1"/>
-          <p:nvPr/>
-        </p:nvSpPr>
-        <p:spPr>
-          <a:xfrm>
-            <a:off x="8281672" y="2671278"/>
-            <a:ext cx="1722908" cy="923330"/>
-          </a:xfrm>
-          <a:prstGeom prst="rect">
-            <a:avLst/>
-          </a:prstGeom>
-          <a:noFill/>
-        </p:spPr>
-        <p:txBody>
-          <a:bodyPr wrap="none" rtlCol="0">
-            <a:spAutoFit/>
-          </a:bodyPr>
-          <a:lstStyle/>
-          <a:p>
-            <a:pPr algn="ctr"/>
-            <a:r>
-              <a:rPr lang="en-US" b="1" dirty="0"/>
-              <a:t>deep</a:t>
-            </a:r>
-            <a:r>
-              <a:rPr lang="en-US" dirty="0"/>
-              <a:t> waveguide</a:t>
-            </a:r>
-          </a:p>
-          <a:p>
-            <a:pPr algn="ctr"/>
-            <a:endParaRPr lang="en-US" dirty="0"/>
-          </a:p>
-          <a:p>
-            <a:pPr algn="ctr"/>
-            <a:r>
-              <a:rPr lang="en-US" dirty="0"/>
-              <a:t>Paste plot here</a:t>
-            </a:r>
-          </a:p>
-        </p:txBody>
-      </p:sp>
-      <p:sp>
-        <p:nvSpPr>
           <p:cNvPr id="9" name="CuadroTexto 8">
             <a:extLst>
               <a:ext uri="{FF2B5EF4-FFF2-40B4-BE49-F238E27FC236}">
@@ -5764,6 +5621,66 @@
           </a:p>
         </p:txBody>
       </p:sp>
+      <p:pic>
+        <p:nvPicPr>
+          <p:cNvPr id="12" name="Imagen 11">
+            <a:extLst>
+              <a:ext uri="{FF2B5EF4-FFF2-40B4-BE49-F238E27FC236}">
+                <a16:creationId xmlns:a16="http://schemas.microsoft.com/office/drawing/2014/main" id="{75641DD1-DBE2-2241-6A76-88F775C86AEA}"/>
+              </a:ext>
+            </a:extLst>
+          </p:cNvPr>
+          <p:cNvPicPr>
+            <a:picLocks noChangeAspect="1"/>
+          </p:cNvPicPr>
+          <p:nvPr/>
+        </p:nvPicPr>
+        <p:blipFill>
+          <a:blip r:embed="rId5"/>
+          <a:stretch>
+            <a:fillRect/>
+          </a:stretch>
+        </p:blipFill>
+        <p:spPr>
+          <a:xfrm>
+            <a:off x="6585017" y="1598200"/>
+            <a:ext cx="5116217" cy="2984461"/>
+          </a:xfrm>
+          <a:prstGeom prst="rect">
+            <a:avLst/>
+          </a:prstGeom>
+        </p:spPr>
+      </p:pic>
+      <p:pic>
+        <p:nvPicPr>
+          <p:cNvPr id="14" name="Imagen 13">
+            <a:extLst>
+              <a:ext uri="{FF2B5EF4-FFF2-40B4-BE49-F238E27FC236}">
+                <a16:creationId xmlns:a16="http://schemas.microsoft.com/office/drawing/2014/main" id="{A7A2E7B2-A716-F804-A704-25AEA8F4C381}"/>
+              </a:ext>
+            </a:extLst>
+          </p:cNvPr>
+          <p:cNvPicPr>
+            <a:picLocks noChangeAspect="1"/>
+          </p:cNvPicPr>
+          <p:nvPr/>
+        </p:nvPicPr>
+        <p:blipFill>
+          <a:blip r:embed="rId6"/>
+          <a:stretch>
+            <a:fillRect/>
+          </a:stretch>
+        </p:blipFill>
+        <p:spPr>
+          <a:xfrm>
+            <a:off x="642988" y="1475527"/>
+            <a:ext cx="5148211" cy="3003123"/>
+          </a:xfrm>
+          <a:prstGeom prst="rect">
+            <a:avLst/>
+          </a:prstGeom>
+        </p:spPr>
+      </p:pic>
     </p:spTree>
     <p:extLst>
       <p:ext uri="{BB962C8B-B14F-4D97-AF65-F5344CB8AC3E}">
@@ -5974,7 +5891,7 @@
         <p:spPr>
           <a:xfrm>
             <a:off x="609441" y="4860334"/>
-            <a:ext cx="11199971" cy="1200329"/>
+            <a:ext cx="11199971" cy="1384995"/>
           </a:xfrm>
           <a:prstGeom prst="rect">
             <a:avLst/>
@@ -5998,43 +5915,17 @@
           <a:p>
             <a:pPr algn="just"/>
             <a:r>
-              <a:rPr lang="en-US" sz="1200" dirty="0">
-                <a:latin typeface="Arial" panose="020B0604020202020204" pitchFamily="34" charset="0"/>
-                <a:cs typeface="Arial" panose="020B0604020202020204" pitchFamily="34" charset="0"/>
-              </a:rPr>
-              <a:t>Comment results (neff changes this way with width, polarization behavior, </a:t>
-            </a:r>
-            <a:r>
-              <a:rPr lang="en-US" sz="1200" dirty="0" err="1">
-                <a:latin typeface="Arial" panose="020B0604020202020204" pitchFamily="34" charset="0"/>
-                <a:cs typeface="Arial" panose="020B0604020202020204" pitchFamily="34" charset="0"/>
-              </a:rPr>
-              <a:t>etc</a:t>
-            </a:r>
-            <a:r>
-              <a:rPr lang="en-US" sz="1200" dirty="0">
-                <a:latin typeface="Arial" panose="020B0604020202020204" pitchFamily="34" charset="0"/>
-                <a:cs typeface="Arial" panose="020B0604020202020204" pitchFamily="34" charset="0"/>
-              </a:rPr>
-              <a:t>…)</a:t>
-            </a:r>
-          </a:p>
-          <a:p>
-            <a:pPr algn="just"/>
-            <a:endParaRPr lang="en-US" sz="1200" dirty="0">
-              <a:latin typeface="Arial" panose="020B0604020202020204" pitchFamily="34" charset="0"/>
-              <a:cs typeface="Arial" panose="020B0604020202020204" pitchFamily="34" charset="0"/>
-            </a:endParaRPr>
-          </a:p>
-          <a:p>
-            <a:pPr algn="just"/>
-            <a:endParaRPr lang="en-US" sz="1200" dirty="0">
-              <a:latin typeface="Arial" panose="020B0604020202020204" pitchFamily="34" charset="0"/>
-              <a:cs typeface="Arial" panose="020B0604020202020204" pitchFamily="34" charset="0"/>
-            </a:endParaRPr>
-          </a:p>
-          <a:p>
-            <a:pPr algn="just"/>
+              <a:rPr lang="en-US" sz="1200" dirty="0"/>
+              <a:t>The effective index increases with waveguide width for all modes. As the width becomes larger, the optical field is better confined inside the core, which produces higher </a:t>
+            </a:r>
+            <a:r>
+              <a:rPr lang="en-US" sz="1200" dirty="0" err="1"/>
+              <a:t>neff</a:t>
+            </a:r>
+            <a:r>
+              <a:rPr lang="en-US" sz="1200" dirty="0"/>
+              <a:t> values. This increase is stronger for the fundamental mode and becomes more noticeable as the width exceeds about 1.0 µm. The graph also shows that wider waveguides support more guided modes, since higher-order modes become more clearly separated from the SiO2 index line. Regarding polarization behavior, the TE fraction indicates that some modes are predominantly TE-like while others are more TM-like, confirming that polarization depends on geometry and modal order. Therefore, waveguide width is a key parameter to control confinement, modal content, and polarization response.</a:t>
+            </a:r>
             <a:endParaRPr lang="en-US" sz="1200" dirty="0">
               <a:latin typeface="Arial" panose="020B0604020202020204" pitchFamily="34" charset="0"/>
               <a:cs typeface="Arial" panose="020B0604020202020204" pitchFamily="34" charset="0"/>
@@ -6108,57 +5999,36 @@
           </a:p>
         </p:txBody>
       </p:sp>
-      <p:sp>
-        <p:nvSpPr>
-          <p:cNvPr id="8" name="CuadroTexto 7">
-            <a:extLst>
-              <a:ext uri="{FF2B5EF4-FFF2-40B4-BE49-F238E27FC236}">
-                <a16:creationId xmlns:a16="http://schemas.microsoft.com/office/drawing/2014/main" id="{1EF5BFDA-8EC1-8C73-A932-F36C4DB93C73}"/>
-              </a:ext>
-            </a:extLst>
-          </p:cNvPr>
-          <p:cNvSpPr txBox="1"/>
+      <p:pic>
+        <p:nvPicPr>
+          <p:cNvPr id="5" name="Imagen 4">
+            <a:extLst>
+              <a:ext uri="{FF2B5EF4-FFF2-40B4-BE49-F238E27FC236}">
+                <a16:creationId xmlns:a16="http://schemas.microsoft.com/office/drawing/2014/main" id="{FAC69F11-63B9-DC0E-C807-12D3B73BFF4C}"/>
+              </a:ext>
+            </a:extLst>
+          </p:cNvPr>
+          <p:cNvPicPr>
+            <a:picLocks noChangeAspect="1"/>
+          </p:cNvPicPr>
           <p:nvPr/>
-        </p:nvSpPr>
-        <p:spPr>
-          <a:xfrm>
-            <a:off x="2286000" y="2671278"/>
-            <a:ext cx="7718580" cy="923330"/>
+        </p:nvPicPr>
+        <p:blipFill>
+          <a:blip r:embed="rId5"/>
+          <a:stretch>
+            <a:fillRect/>
+          </a:stretch>
+        </p:blipFill>
+        <p:spPr>
+          <a:xfrm>
+            <a:off x="3467100" y="1512170"/>
+            <a:ext cx="5257800" cy="3060791"/>
           </a:xfrm>
           <a:prstGeom prst="rect">
             <a:avLst/>
           </a:prstGeom>
-          <a:noFill/>
-        </p:spPr>
-        <p:txBody>
-          <a:bodyPr wrap="square" rtlCol="0">
-            <a:spAutoFit/>
-          </a:bodyPr>
-          <a:lstStyle/>
-          <a:p>
-            <a:pPr algn="ctr"/>
-            <a:r>
-              <a:rPr lang="en-US" b="1" dirty="0"/>
-              <a:t>deep</a:t>
-            </a:r>
-            <a:r>
-              <a:rPr lang="en-US" dirty="0"/>
-              <a:t> waveguide</a:t>
-            </a:r>
-          </a:p>
-          <a:p>
-            <a:pPr algn="ctr"/>
-            <a:endParaRPr lang="en-US" dirty="0"/>
-          </a:p>
-          <a:p>
-            <a:pPr algn="ctr"/>
-            <a:r>
-              <a:rPr lang="en-US" dirty="0"/>
-              <a:t>Paste plot here</a:t>
-            </a:r>
-          </a:p>
-        </p:txBody>
-      </p:sp>
+        </p:spPr>
+      </p:pic>
     </p:spTree>
     <p:extLst>
       <p:ext uri="{BB962C8B-B14F-4D97-AF65-F5344CB8AC3E}">
@@ -6376,522 +6246,79 @@
           </a:p>
         </p:txBody>
       </p:sp>
-      <mc:AlternateContent xmlns:mc="http://schemas.openxmlformats.org/markup-compatibility/2006" xmlns:a14="http://schemas.microsoft.com/office/drawing/2010/main">
-        <mc:Choice Requires="a14">
-          <p:sp>
-            <p:nvSpPr>
-              <p:cNvPr id="2" name="CuadroTexto 1">
-                <a:extLst>
-                  <a:ext uri="{FF2B5EF4-FFF2-40B4-BE49-F238E27FC236}">
-                    <a16:creationId xmlns:a16="http://schemas.microsoft.com/office/drawing/2014/main" id="{A440F587-93A3-E474-C0B0-883BB9DAFD85}"/>
-                  </a:ext>
-                </a:extLst>
-              </p:cNvPr>
-              <p:cNvSpPr txBox="1"/>
-              <p:nvPr/>
-            </p:nvSpPr>
-            <p:spPr>
-              <a:xfrm>
-                <a:off x="609441" y="4860334"/>
-                <a:ext cx="11198542" cy="1361911"/>
-              </a:xfrm>
-              <a:prstGeom prst="rect">
-                <a:avLst/>
-              </a:prstGeom>
-              <a:solidFill>
-                <a:schemeClr val="bg1">
-                  <a:lumMod val="95000"/>
-                </a:schemeClr>
-              </a:solidFill>
-              <a:ln w="28575">
-                <a:solidFill>
-                  <a:srgbClr val="E0700D"/>
-                </a:solidFill>
-              </a:ln>
-            </p:spPr>
-            <p:txBody>
-              <a:bodyPr wrap="square" rtlCol="0">
-                <a:spAutoFit/>
-              </a:bodyPr>
-              <a:lstStyle/>
-              <a:p>
-                <a:pPr algn="just"/>
-                <a:r>
-                  <a:rPr lang="en-US" sz="1200" dirty="0">
-                    <a:latin typeface="Arial" panose="020B0604020202020204" pitchFamily="34" charset="0"/>
-                    <a:cs typeface="Arial" panose="020B0604020202020204" pitchFamily="34" charset="0"/>
-                  </a:rPr>
-                  <a:t>Find the second-degree polynomial coefficients and relate them with the group index and the dispersion parameter. </a:t>
-                </a:r>
-                <a14:m>
-                  <m:oMath xmlns:m="http://schemas.openxmlformats.org/officeDocument/2006/math">
-                    <m:d>
-                      <m:dPr>
-                        <m:begChr m:val="{"/>
-                        <m:endChr m:val=""/>
-                        <m:ctrlPr>
-                          <a:rPr lang="es-ES" sz="1200" b="0" i="1" smtClean="0">
-                            <a:latin typeface="Cambria Math" panose="02040503050406030204" pitchFamily="18" charset="0"/>
-                            <a:cs typeface="Arial" panose="020B0604020202020204" pitchFamily="34" charset="0"/>
-                          </a:rPr>
-                        </m:ctrlPr>
-                      </m:dPr>
-                      <m:e>
-                        <m:eqArr>
-                          <m:eqArrPr>
-                            <m:ctrlPr>
-                              <a:rPr lang="es-ES" sz="1200" b="0" i="1" smtClean="0">
-                                <a:latin typeface="Cambria Math" panose="02040503050406030204" pitchFamily="18" charset="0"/>
-                                <a:cs typeface="Arial" panose="020B0604020202020204" pitchFamily="34" charset="0"/>
-                              </a:rPr>
-                            </m:ctrlPr>
-                          </m:eqArrPr>
-                          <m:e>
-                            <m:sSub>
-                              <m:sSubPr>
-                                <m:ctrlPr>
-                                  <a:rPr lang="es-ES" sz="1200" b="0" i="1" smtClean="0">
-                                    <a:latin typeface="Cambria Math" panose="02040503050406030204" pitchFamily="18" charset="0"/>
-                                    <a:cs typeface="Arial" panose="020B0604020202020204" pitchFamily="34" charset="0"/>
-                                  </a:rPr>
-                                </m:ctrlPr>
-                              </m:sSubPr>
-                              <m:e>
-                                <m:r>
-                                  <a:rPr lang="es-ES" sz="1200" b="0" i="1" smtClean="0">
-                                    <a:latin typeface="Cambria Math" panose="02040503050406030204" pitchFamily="18" charset="0"/>
-                                    <a:cs typeface="Arial" panose="020B0604020202020204" pitchFamily="34" charset="0"/>
-                                  </a:rPr>
-                                  <m:t>𝑛</m:t>
-                                </m:r>
-                              </m:e>
-                              <m:sub>
-                                <m:r>
-                                  <a:rPr lang="es-ES" sz="1200" b="0" i="1" smtClean="0">
-                                    <a:latin typeface="Cambria Math" panose="02040503050406030204" pitchFamily="18" charset="0"/>
-                                    <a:cs typeface="Arial" panose="020B0604020202020204" pitchFamily="34" charset="0"/>
-                                  </a:rPr>
-                                  <m:t>𝑒𝑓𝑓</m:t>
-                                </m:r>
-                              </m:sub>
-                            </m:sSub>
-                            <m:r>
-                              <a:rPr lang="es-ES" sz="1200" b="0" i="1" smtClean="0">
-                                <a:latin typeface="Cambria Math" panose="02040503050406030204" pitchFamily="18" charset="0"/>
-                                <a:cs typeface="Arial" panose="020B0604020202020204" pitchFamily="34" charset="0"/>
-                              </a:rPr>
-                              <m:t>=</m:t>
-                            </m:r>
-                            <m:sSub>
-                              <m:sSubPr>
-                                <m:ctrlPr>
-                                  <a:rPr lang="es-ES" sz="1200" b="0" i="1" smtClean="0">
-                                    <a:latin typeface="Cambria Math" panose="02040503050406030204" pitchFamily="18" charset="0"/>
-                                    <a:cs typeface="Arial" panose="020B0604020202020204" pitchFamily="34" charset="0"/>
-                                  </a:rPr>
-                                </m:ctrlPr>
-                              </m:sSubPr>
-                              <m:e>
-                                <m:r>
-                                  <a:rPr lang="es-ES" sz="1200" b="0" i="1" smtClean="0">
-                                    <a:latin typeface="Cambria Math" panose="02040503050406030204" pitchFamily="18" charset="0"/>
-                                    <a:cs typeface="Arial" panose="020B0604020202020204" pitchFamily="34" charset="0"/>
-                                  </a:rPr>
-                                  <m:t>𝑛</m:t>
-                                </m:r>
-                              </m:e>
-                              <m:sub>
-                                <m:r>
-                                  <a:rPr lang="es-ES" sz="1200" b="0" i="1" smtClean="0">
-                                    <a:latin typeface="Cambria Math" panose="02040503050406030204" pitchFamily="18" charset="0"/>
-                                    <a:cs typeface="Arial" panose="020B0604020202020204" pitchFamily="34" charset="0"/>
-                                  </a:rPr>
-                                  <m:t>1</m:t>
-                                </m:r>
-                              </m:sub>
-                            </m:sSub>
-                          </m:e>
-                          <m:e>
-                            <m:sSub>
-                              <m:sSubPr>
-                                <m:ctrlPr>
-                                  <a:rPr lang="es-ES" sz="1200" b="0" i="1" smtClean="0">
-                                    <a:latin typeface="Cambria Math" panose="02040503050406030204" pitchFamily="18" charset="0"/>
-                                    <a:cs typeface="Arial" panose="020B0604020202020204" pitchFamily="34" charset="0"/>
-                                  </a:rPr>
-                                </m:ctrlPr>
-                              </m:sSubPr>
-                              <m:e>
-                                <m:r>
-                                  <a:rPr lang="es-ES" sz="1200" b="0" i="1" smtClean="0">
-                                    <a:latin typeface="Cambria Math" panose="02040503050406030204" pitchFamily="18" charset="0"/>
-                                    <a:cs typeface="Arial" panose="020B0604020202020204" pitchFamily="34" charset="0"/>
-                                  </a:rPr>
-                                  <m:t>𝑛</m:t>
-                                </m:r>
-                              </m:e>
-                              <m:sub>
-                                <m:r>
-                                  <a:rPr lang="es-ES" sz="1200" b="0" i="1" smtClean="0">
-                                    <a:latin typeface="Cambria Math" panose="02040503050406030204" pitchFamily="18" charset="0"/>
-                                    <a:cs typeface="Arial" panose="020B0604020202020204" pitchFamily="34" charset="0"/>
-                                  </a:rPr>
-                                  <m:t>𝑔</m:t>
-                                </m:r>
-                              </m:sub>
-                            </m:sSub>
-                            <m:r>
-                              <a:rPr lang="es-ES" sz="1200" b="0" i="1" smtClean="0">
-                                <a:latin typeface="Cambria Math" panose="02040503050406030204" pitchFamily="18" charset="0"/>
-                                <a:cs typeface="Arial" panose="020B0604020202020204" pitchFamily="34" charset="0"/>
-                              </a:rPr>
-                              <m:t>=</m:t>
-                            </m:r>
-                            <m:sSub>
-                              <m:sSubPr>
-                                <m:ctrlPr>
-                                  <a:rPr lang="es-ES" sz="1200" b="0" i="1" smtClean="0">
-                                    <a:latin typeface="Cambria Math" panose="02040503050406030204" pitchFamily="18" charset="0"/>
-                                    <a:cs typeface="Arial" panose="020B0604020202020204" pitchFamily="34" charset="0"/>
-                                  </a:rPr>
-                                </m:ctrlPr>
-                              </m:sSubPr>
-                              <m:e>
-                                <m:r>
-                                  <a:rPr lang="es-ES" sz="1200" b="0" i="1" smtClean="0">
-                                    <a:latin typeface="Cambria Math" panose="02040503050406030204" pitchFamily="18" charset="0"/>
-                                    <a:cs typeface="Arial" panose="020B0604020202020204" pitchFamily="34" charset="0"/>
-                                  </a:rPr>
-                                  <m:t>𝑛</m:t>
-                                </m:r>
-                              </m:e>
-                              <m:sub>
-                                <m:r>
-                                  <a:rPr lang="es-ES" sz="1200" b="0" i="1" smtClean="0">
-                                    <a:latin typeface="Cambria Math" panose="02040503050406030204" pitchFamily="18" charset="0"/>
-                                    <a:cs typeface="Arial" panose="020B0604020202020204" pitchFamily="34" charset="0"/>
-                                  </a:rPr>
-                                  <m:t>1</m:t>
-                                </m:r>
-                              </m:sub>
-                            </m:sSub>
-                            <m:r>
-                              <a:rPr lang="es-ES" sz="1200" b="0" i="1" smtClean="0">
-                                <a:latin typeface="Cambria Math" panose="02040503050406030204" pitchFamily="18" charset="0"/>
-                                <a:cs typeface="Arial" panose="020B0604020202020204" pitchFamily="34" charset="0"/>
-                              </a:rPr>
-                              <m:t>−</m:t>
-                            </m:r>
-                            <m:sSub>
-                              <m:sSubPr>
-                                <m:ctrlPr>
-                                  <a:rPr lang="es-ES" sz="1200" b="0" i="1" smtClean="0">
-                                    <a:latin typeface="Cambria Math" panose="02040503050406030204" pitchFamily="18" charset="0"/>
-                                    <a:cs typeface="Arial" panose="020B0604020202020204" pitchFamily="34" charset="0"/>
-                                  </a:rPr>
-                                </m:ctrlPr>
-                              </m:sSubPr>
-                              <m:e>
-                                <m:r>
-                                  <a:rPr lang="es-ES" sz="1200" b="0" i="1" smtClean="0">
-                                    <a:latin typeface="Cambria Math" panose="02040503050406030204" pitchFamily="18" charset="0"/>
-                                    <a:cs typeface="Arial" panose="020B0604020202020204" pitchFamily="34" charset="0"/>
-                                  </a:rPr>
-                                  <m:t>𝑛</m:t>
-                                </m:r>
-                              </m:e>
-                              <m:sub>
-                                <m:r>
-                                  <a:rPr lang="es-ES" sz="1200" b="0" i="1" smtClean="0">
-                                    <a:latin typeface="Cambria Math" panose="02040503050406030204" pitchFamily="18" charset="0"/>
-                                    <a:cs typeface="Arial" panose="020B0604020202020204" pitchFamily="34" charset="0"/>
-                                  </a:rPr>
-                                  <m:t>2</m:t>
-                                </m:r>
-                              </m:sub>
-                            </m:sSub>
-                            <m:sSub>
-                              <m:sSubPr>
-                                <m:ctrlPr>
-                                  <a:rPr lang="es-ES" sz="1200" b="0" i="1" smtClean="0">
-                                    <a:latin typeface="Cambria Math" panose="02040503050406030204" pitchFamily="18" charset="0"/>
-                                    <a:cs typeface="Arial" panose="020B0604020202020204" pitchFamily="34" charset="0"/>
-                                  </a:rPr>
-                                </m:ctrlPr>
-                              </m:sSubPr>
-                              <m:e>
-                                <m:r>
-                                  <a:rPr lang="es-ES" sz="1200" b="0" i="1" smtClean="0">
-                                    <a:latin typeface="Cambria Math" panose="02040503050406030204" pitchFamily="18" charset="0"/>
-                                    <a:cs typeface="Arial" panose="020B0604020202020204" pitchFamily="34" charset="0"/>
-                                  </a:rPr>
-                                  <m:t>𝜆</m:t>
-                                </m:r>
-                              </m:e>
-                              <m:sub>
-                                <m:r>
-                                  <a:rPr lang="es-ES" sz="1200" b="0" i="1" smtClean="0">
-                                    <a:latin typeface="Cambria Math" panose="02040503050406030204" pitchFamily="18" charset="0"/>
-                                    <a:cs typeface="Arial" panose="020B0604020202020204" pitchFamily="34" charset="0"/>
-                                  </a:rPr>
-                                  <m:t>0</m:t>
-                                </m:r>
-                              </m:sub>
-                            </m:sSub>
-                          </m:e>
-                          <m:e>
-                            <m:r>
-                              <a:rPr lang="es-ES" sz="1200" b="0" i="1" smtClean="0">
-                                <a:latin typeface="Cambria Math" panose="02040503050406030204" pitchFamily="18" charset="0"/>
-                                <a:cs typeface="Arial" panose="020B0604020202020204" pitchFamily="34" charset="0"/>
-                              </a:rPr>
-                              <m:t>𝐷</m:t>
-                            </m:r>
-                            <m:r>
-                              <a:rPr lang="es-ES" sz="1200" b="0" i="1" smtClean="0">
-                                <a:latin typeface="Cambria Math" panose="02040503050406030204" pitchFamily="18" charset="0"/>
-                                <a:cs typeface="Arial" panose="020B0604020202020204" pitchFamily="34" charset="0"/>
-                              </a:rPr>
-                              <m:t>=−</m:t>
-                            </m:r>
-                            <m:f>
-                              <m:fPr>
-                                <m:ctrlPr>
-                                  <a:rPr lang="es-ES" sz="1200" b="0" i="1" smtClean="0">
-                                    <a:latin typeface="Cambria Math" panose="02040503050406030204" pitchFamily="18" charset="0"/>
-                                    <a:cs typeface="Arial" panose="020B0604020202020204" pitchFamily="34" charset="0"/>
-                                  </a:rPr>
-                                </m:ctrlPr>
-                              </m:fPr>
-                              <m:num>
-                                <m:r>
-                                  <a:rPr lang="es-ES" sz="1200" b="0" i="1" smtClean="0">
-                                    <a:latin typeface="Cambria Math" panose="02040503050406030204" pitchFamily="18" charset="0"/>
-                                    <a:cs typeface="Arial" panose="020B0604020202020204" pitchFamily="34" charset="0"/>
-                                  </a:rPr>
-                                  <m:t>2</m:t>
-                                </m:r>
-                                <m:sSub>
-                                  <m:sSubPr>
-                                    <m:ctrlPr>
-                                      <a:rPr lang="es-ES" sz="1200" b="0" i="1" smtClean="0">
-                                        <a:latin typeface="Cambria Math" panose="02040503050406030204" pitchFamily="18" charset="0"/>
-                                        <a:cs typeface="Arial" panose="020B0604020202020204" pitchFamily="34" charset="0"/>
-                                      </a:rPr>
-                                    </m:ctrlPr>
-                                  </m:sSubPr>
-                                  <m:e>
-                                    <m:r>
-                                      <a:rPr lang="es-ES" sz="1200" b="0" i="1" smtClean="0">
-                                        <a:latin typeface="Cambria Math" panose="02040503050406030204" pitchFamily="18" charset="0"/>
-                                        <a:cs typeface="Arial" panose="020B0604020202020204" pitchFamily="34" charset="0"/>
-                                      </a:rPr>
-                                      <m:t>𝜆</m:t>
-                                    </m:r>
-                                  </m:e>
-                                  <m:sub>
-                                    <m:r>
-                                      <a:rPr lang="es-ES" sz="1200" b="0" i="1" smtClean="0">
-                                        <a:latin typeface="Cambria Math" panose="02040503050406030204" pitchFamily="18" charset="0"/>
-                                        <a:cs typeface="Arial" panose="020B0604020202020204" pitchFamily="34" charset="0"/>
-                                      </a:rPr>
-                                      <m:t>0</m:t>
-                                    </m:r>
-                                  </m:sub>
-                                </m:sSub>
-                                <m:sSub>
-                                  <m:sSubPr>
-                                    <m:ctrlPr>
-                                      <a:rPr lang="es-ES" sz="1200" b="0" i="1" smtClean="0">
-                                        <a:latin typeface="Cambria Math" panose="02040503050406030204" pitchFamily="18" charset="0"/>
-                                        <a:cs typeface="Arial" panose="020B0604020202020204" pitchFamily="34" charset="0"/>
-                                      </a:rPr>
-                                    </m:ctrlPr>
-                                  </m:sSubPr>
-                                  <m:e>
-                                    <m:r>
-                                      <a:rPr lang="es-ES" sz="1200" b="0" i="1" smtClean="0">
-                                        <a:latin typeface="Cambria Math" panose="02040503050406030204" pitchFamily="18" charset="0"/>
-                                        <a:cs typeface="Arial" panose="020B0604020202020204" pitchFamily="34" charset="0"/>
-                                      </a:rPr>
-                                      <m:t>𝑛</m:t>
-                                    </m:r>
-                                  </m:e>
-                                  <m:sub>
-                                    <m:r>
-                                      <a:rPr lang="es-ES" sz="1200" b="0" i="1" smtClean="0">
-                                        <a:latin typeface="Cambria Math" panose="02040503050406030204" pitchFamily="18" charset="0"/>
-                                        <a:cs typeface="Arial" panose="020B0604020202020204" pitchFamily="34" charset="0"/>
-                                      </a:rPr>
-                                      <m:t>3</m:t>
-                                    </m:r>
-                                  </m:sub>
-                                </m:sSub>
-                              </m:num>
-                              <m:den>
-                                <m:r>
-                                  <a:rPr lang="es-ES" sz="1200" b="0" i="1" smtClean="0">
-                                    <a:latin typeface="Cambria Math" panose="02040503050406030204" pitchFamily="18" charset="0"/>
-                                    <a:cs typeface="Arial" panose="020B0604020202020204" pitchFamily="34" charset="0"/>
-                                  </a:rPr>
-                                  <m:t>𝑐</m:t>
-                                </m:r>
-                              </m:den>
-                            </m:f>
-                            <m:d>
-                              <m:dPr>
-                                <m:begChr m:val="["/>
-                                <m:endChr m:val="]"/>
-                                <m:ctrlPr>
-                                  <a:rPr lang="es-ES" sz="1200" b="0" i="1" smtClean="0">
-                                    <a:latin typeface="Cambria Math" panose="02040503050406030204" pitchFamily="18" charset="0"/>
-                                    <a:cs typeface="Arial" panose="020B0604020202020204" pitchFamily="34" charset="0"/>
-                                  </a:rPr>
-                                </m:ctrlPr>
-                              </m:dPr>
-                              <m:e>
-                                <m:f>
-                                  <m:fPr>
-                                    <m:ctrlPr>
-                                      <a:rPr lang="es-ES" sz="1200" b="0" i="1" smtClean="0">
-                                        <a:latin typeface="Cambria Math" panose="02040503050406030204" pitchFamily="18" charset="0"/>
-                                        <a:cs typeface="Arial" panose="020B0604020202020204" pitchFamily="34" charset="0"/>
-                                      </a:rPr>
-                                    </m:ctrlPr>
-                                  </m:fPr>
-                                  <m:num>
-                                    <m:sSup>
-                                      <m:sSupPr>
-                                        <m:ctrlPr>
-                                          <a:rPr lang="es-ES" sz="1200" b="0" i="1" smtClean="0">
-                                            <a:latin typeface="Cambria Math" panose="02040503050406030204" pitchFamily="18" charset="0"/>
-                                            <a:cs typeface="Arial" panose="020B0604020202020204" pitchFamily="34" charset="0"/>
-                                          </a:rPr>
-                                        </m:ctrlPr>
-                                      </m:sSupPr>
-                                      <m:e>
-                                        <m:r>
-                                          <a:rPr lang="es-ES" sz="1200" b="0" i="1" smtClean="0">
-                                            <a:latin typeface="Cambria Math" panose="02040503050406030204" pitchFamily="18" charset="0"/>
-                                            <a:cs typeface="Arial" panose="020B0604020202020204" pitchFamily="34" charset="0"/>
-                                          </a:rPr>
-                                          <m:t>𝑠</m:t>
-                                        </m:r>
-                                      </m:e>
-                                      <m:sup>
-                                        <m:r>
-                                          <a:rPr lang="es-ES" sz="1200" b="0" i="1" smtClean="0">
-                                            <a:latin typeface="Cambria Math" panose="02040503050406030204" pitchFamily="18" charset="0"/>
-                                            <a:cs typeface="Arial" panose="020B0604020202020204" pitchFamily="34" charset="0"/>
-                                          </a:rPr>
-                                          <m:t>2</m:t>
-                                        </m:r>
-                                      </m:sup>
-                                    </m:sSup>
-                                  </m:num>
-                                  <m:den>
-                                    <m:r>
-                                      <a:rPr lang="es-ES" sz="1200" b="0" i="1" smtClean="0">
-                                        <a:latin typeface="Cambria Math" panose="02040503050406030204" pitchFamily="18" charset="0"/>
-                                        <a:cs typeface="Arial" panose="020B0604020202020204" pitchFamily="34" charset="0"/>
-                                      </a:rPr>
-                                      <m:t>𝑚</m:t>
-                                    </m:r>
-                                  </m:den>
-                                </m:f>
-                              </m:e>
-                            </m:d>
-                          </m:e>
-                        </m:eqArr>
-                      </m:e>
-                    </m:d>
-                  </m:oMath>
-                </a14:m>
-                <a:endParaRPr lang="es-ES" sz="1200" b="0" dirty="0">
-                  <a:latin typeface="Arial" panose="020B0604020202020204" pitchFamily="34" charset="0"/>
-                  <a:cs typeface="Arial" panose="020B0604020202020204" pitchFamily="34" charset="0"/>
-                </a:endParaRPr>
-              </a:p>
-              <a:p>
-                <a:pPr algn="just"/>
-                <a:r>
-                  <a:rPr lang="en-US" sz="1200" dirty="0">
-                    <a:latin typeface="Arial" panose="020B0604020202020204" pitchFamily="34" charset="0"/>
-                    <a:cs typeface="Arial" panose="020B0604020202020204" pitchFamily="34" charset="0"/>
-                  </a:rPr>
-                  <a:t> </a:t>
-                </a:r>
-              </a:p>
-              <a:p>
-                <a:pPr algn="just"/>
-                <a:r>
-                  <a:rPr lang="en-US" sz="1200" dirty="0">
-                    <a:latin typeface="Arial" panose="020B0604020202020204" pitchFamily="34" charset="0"/>
-                    <a:cs typeface="Arial" panose="020B0604020202020204" pitchFamily="34" charset="0"/>
-                  </a:rPr>
-                  <a:t>Comment on the results found for the TE0 and TM0 for both deep and shallow waveguides. </a:t>
-                </a:r>
-              </a:p>
-              <a:p>
-                <a:pPr algn="just"/>
-                <a:endParaRPr lang="en-US" sz="1200" dirty="0">
-                  <a:latin typeface="Arial" panose="020B0604020202020204" pitchFamily="34" charset="0"/>
-                  <a:cs typeface="Arial" panose="020B0604020202020204" pitchFamily="34" charset="0"/>
-                </a:endParaRPr>
-              </a:p>
-            </p:txBody>
-          </p:sp>
-        </mc:Choice>
-        <mc:Fallback xmlns="">
-          <p:sp>
-            <p:nvSpPr>
-              <p:cNvPr id="2" name="CuadroTexto 1">
-                <a:extLst>
-                  <a:ext uri="{FF2B5EF4-FFF2-40B4-BE49-F238E27FC236}">
-                    <a16:creationId xmlns:a16="http://schemas.microsoft.com/office/drawing/2014/main" id="{A440F587-93A3-E474-C0B0-883BB9DAFD85}"/>
-                  </a:ext>
-                </a:extLst>
-              </p:cNvPr>
-              <p:cNvSpPr txBox="1">
-                <a:spLocks noRot="1" noChangeAspect="1" noMove="1" noResize="1" noEditPoints="1" noAdjustHandles="1" noChangeArrowheads="1" noChangeShapeType="1" noTextEdit="1"/>
-              </p:cNvSpPr>
-              <p:nvPr/>
-            </p:nvSpPr>
-            <p:spPr>
-              <a:xfrm>
-                <a:off x="609441" y="4860334"/>
-                <a:ext cx="11198542" cy="1361911"/>
-              </a:xfrm>
-              <a:prstGeom prst="rect">
-                <a:avLst/>
-              </a:prstGeom>
-              <a:blipFill>
-                <a:blip r:embed="rId6"/>
-                <a:stretch>
-                  <a:fillRect/>
-                </a:stretch>
-              </a:blipFill>
-              <a:ln w="28575">
-                <a:solidFill>
-                  <a:srgbClr val="E0700D"/>
-                </a:solidFill>
-              </a:ln>
-            </p:spPr>
-            <p:txBody>
-              <a:bodyPr/>
-              <a:lstStyle/>
-              <a:p>
-                <a:r>
-                  <a:rPr lang="es-ES">
-                    <a:noFill/>
-                  </a:rPr>
-                  <a:t> </a:t>
-                </a:r>
-              </a:p>
-            </p:txBody>
-          </p:sp>
-        </mc:Fallback>
-      </mc:AlternateContent>
+      <p:sp>
+        <p:nvSpPr>
+          <p:cNvPr id="2" name="CuadroTexto 1">
+            <a:extLst>
+              <a:ext uri="{FF2B5EF4-FFF2-40B4-BE49-F238E27FC236}">
+                <a16:creationId xmlns:a16="http://schemas.microsoft.com/office/drawing/2014/main" id="{A440F587-93A3-E474-C0B0-883BB9DAFD85}"/>
+              </a:ext>
+            </a:extLst>
+          </p:cNvPr>
+          <p:cNvSpPr txBox="1"/>
+          <p:nvPr/>
+        </p:nvSpPr>
+        <p:spPr>
+          <a:xfrm>
+            <a:off x="609441" y="4860334"/>
+            <a:ext cx="11198542" cy="1200329"/>
+          </a:xfrm>
+          <a:prstGeom prst="rect">
+            <a:avLst/>
+          </a:prstGeom>
+          <a:solidFill>
+            <a:schemeClr val="bg1">
+              <a:lumMod val="95000"/>
+            </a:schemeClr>
+          </a:solidFill>
+          <a:ln w="28575">
+            <a:solidFill>
+              <a:srgbClr val="E0700D"/>
+            </a:solidFill>
+          </a:ln>
+        </p:spPr>
+        <p:txBody>
+          <a:bodyPr wrap="square" rtlCol="0">
+            <a:spAutoFit/>
+          </a:bodyPr>
+          <a:lstStyle/>
+          <a:p>
+            <a:pPr algn="just"/>
+            <a:r>
+              <a:rPr lang="en-US" sz="1200" dirty="0"/>
+              <a:t>The </a:t>
+            </a:r>
+            <a:r>
+              <a:rPr lang="en-US" sz="1200" dirty="0" err="1"/>
+              <a:t>neff</a:t>
+            </a:r>
+            <a:r>
+              <a:rPr lang="en-US" sz="1200" dirty="0"/>
+              <a:t> versus wavelength curves for both TE0 and TM0 can be well approximated by a second-degree polynomial, which makes it possible to build a compact model of the waveguide. In both deep and shallow waveguides, </a:t>
+            </a:r>
+            <a:r>
+              <a:rPr lang="en-US" sz="1200" dirty="0" err="1"/>
+              <a:t>neff</a:t>
+            </a:r>
+            <a:r>
+              <a:rPr lang="en-US" sz="1200" dirty="0"/>
+              <a:t> decreases almost linearly with wavelength, while the small curvature of the fit is related to chromatic dispersion. TE0 always has a higher effective index than TM0, which means that the TE fundamental mode is more strongly confined. In addition, the shallow waveguide presents slightly higher </a:t>
+            </a:r>
+            <a:r>
+              <a:rPr lang="en-US" sz="1200" dirty="0" err="1"/>
+              <a:t>neff</a:t>
+            </a:r>
+            <a:r>
+              <a:rPr lang="en-US" sz="1200" dirty="0"/>
+              <a:t> values than the deep one for both polarizations in the shown plots. From the polynomial coefficients, the first-order term is directly related to the group index, while the second-order term is related to the dispersion parameter D. Since the curvature is small, dispersion is moderate in the analyzed wavelength range, but it is still important for compact modeling and photonic circuit design.</a:t>
+            </a:r>
+            <a:endParaRPr lang="en-US" sz="1200" dirty="0">
+              <a:latin typeface="Arial" panose="020B0604020202020204" pitchFamily="34" charset="0"/>
+              <a:cs typeface="Arial" panose="020B0604020202020204" pitchFamily="34" charset="0"/>
+            </a:endParaRPr>
+          </a:p>
+        </p:txBody>
+      </p:sp>
       <p:sp>
         <p:nvSpPr>
           <p:cNvPr id="5" name="Rectángulo 4">
@@ -6996,298 +6423,6 @@
           </a:p>
         </p:txBody>
       </p:sp>
-      <mc:AlternateContent xmlns:mc="http://schemas.openxmlformats.org/markup-compatibility/2006" xmlns:a14="http://schemas.microsoft.com/office/drawing/2010/main">
-        <mc:Choice Requires="a14">
-          <p:sp>
-            <p:nvSpPr>
-              <p:cNvPr id="9" name="CuadroTexto 8">
-                <a:extLst>
-                  <a:ext uri="{FF2B5EF4-FFF2-40B4-BE49-F238E27FC236}">
-                    <a16:creationId xmlns:a16="http://schemas.microsoft.com/office/drawing/2014/main" id="{C59B6428-4395-242F-54D8-A9FC610F2D7A}"/>
-                  </a:ext>
-                </a:extLst>
-              </p:cNvPr>
-              <p:cNvSpPr txBox="1"/>
-              <p:nvPr/>
-            </p:nvSpPr>
-            <p:spPr>
-              <a:xfrm>
-                <a:off x="609440" y="2709096"/>
-                <a:ext cx="5486559" cy="1200329"/>
-              </a:xfrm>
-              <a:prstGeom prst="rect">
-                <a:avLst/>
-              </a:prstGeom>
-              <a:noFill/>
-            </p:spPr>
-            <p:txBody>
-              <a:bodyPr wrap="square" rtlCol="0">
-                <a:spAutoFit/>
-              </a:bodyPr>
-              <a:lstStyle/>
-              <a:p>
-                <a:pPr algn="ctr"/>
-                <a:r>
-                  <a:rPr lang="en-US" b="1" dirty="0"/>
-                  <a:t>deep</a:t>
-                </a:r>
-                <a:r>
-                  <a:rPr lang="en-US" dirty="0"/>
-                  <a:t> waveguide</a:t>
-                </a:r>
-              </a:p>
-              <a:p>
-                <a:pPr algn="ctr"/>
-                <a:endParaRPr lang="en-US" dirty="0"/>
-              </a:p>
-              <a:p>
-                <a:pPr algn="ctr"/>
-                <a:r>
-                  <a:rPr lang="en-US" b="1" dirty="0"/>
-                  <a:t>neff_TE0 vs </a:t>
-                </a:r>
-                <a14:m>
-                  <m:oMath xmlns:m="http://schemas.openxmlformats.org/officeDocument/2006/math">
-                    <m:r>
-                      <a:rPr lang="es-ES" b="1" i="1" smtClean="0">
-                        <a:latin typeface="Cambria Math" panose="02040503050406030204" pitchFamily="18" charset="0"/>
-                      </a:rPr>
-                      <m:t>𝝀</m:t>
-                    </m:r>
-                  </m:oMath>
-                </a14:m>
-                <a:r>
-                  <a:rPr lang="en-US" b="1" dirty="0"/>
-                  <a:t> </a:t>
-                </a:r>
-                <a:r>
-                  <a:rPr lang="en-US" dirty="0"/>
-                  <a:t>with the second-degree polynomial fit  </a:t>
-                </a:r>
-              </a:p>
-              <a:p>
-                <a:pPr algn="ctr"/>
-                <a:r>
-                  <a:rPr lang="en-US" dirty="0"/>
-                  <a:t>&amp; </a:t>
-                </a:r>
-                <a:r>
-                  <a:rPr lang="en-US" b="1" dirty="0"/>
-                  <a:t>neff_TM0 vs </a:t>
-                </a:r>
-                <a14:m>
-                  <m:oMath xmlns:m="http://schemas.openxmlformats.org/officeDocument/2006/math">
-                    <m:r>
-                      <a:rPr lang="es-ES" b="1" i="1">
-                        <a:latin typeface="Cambria Math" panose="02040503050406030204" pitchFamily="18" charset="0"/>
-                      </a:rPr>
-                      <m:t>𝝀</m:t>
-                    </m:r>
-                  </m:oMath>
-                </a14:m>
-                <a:r>
-                  <a:rPr lang="en-US" b="1" dirty="0"/>
-                  <a:t> </a:t>
-                </a:r>
-                <a:r>
-                  <a:rPr lang="en-US" dirty="0"/>
-                  <a:t>with the second-degree polynomial fit </a:t>
-                </a:r>
-              </a:p>
-            </p:txBody>
-          </p:sp>
-        </mc:Choice>
-        <mc:Fallback xmlns="">
-          <p:sp>
-            <p:nvSpPr>
-              <p:cNvPr id="9" name="CuadroTexto 8">
-                <a:extLst>
-                  <a:ext uri="{FF2B5EF4-FFF2-40B4-BE49-F238E27FC236}">
-                    <a16:creationId xmlns:a16="http://schemas.microsoft.com/office/drawing/2014/main" id="{C59B6428-4395-242F-54D8-A9FC610F2D7A}"/>
-                  </a:ext>
-                </a:extLst>
-              </p:cNvPr>
-              <p:cNvSpPr txBox="1">
-                <a:spLocks noRot="1" noChangeAspect="1" noMove="1" noResize="1" noEditPoints="1" noAdjustHandles="1" noChangeArrowheads="1" noChangeShapeType="1" noTextEdit="1"/>
-              </p:cNvSpPr>
-              <p:nvPr/>
-            </p:nvSpPr>
-            <p:spPr>
-              <a:xfrm>
-                <a:off x="609440" y="2709096"/>
-                <a:ext cx="5486559" cy="1200329"/>
-              </a:xfrm>
-              <a:prstGeom prst="rect">
-                <a:avLst/>
-              </a:prstGeom>
-              <a:blipFill>
-                <a:blip r:embed="rId7"/>
-                <a:stretch>
-                  <a:fillRect t="-2538" r="-556" b="-7107"/>
-                </a:stretch>
-              </a:blipFill>
-            </p:spPr>
-            <p:txBody>
-              <a:bodyPr/>
-              <a:lstStyle/>
-              <a:p>
-                <a:r>
-                  <a:rPr lang="es-ES">
-                    <a:noFill/>
-                  </a:rPr>
-                  <a:t> </a:t>
-                </a:r>
-              </a:p>
-            </p:txBody>
-          </p:sp>
-        </mc:Fallback>
-      </mc:AlternateContent>
-      <mc:AlternateContent xmlns:mc="http://schemas.openxmlformats.org/markup-compatibility/2006" xmlns:a14="http://schemas.microsoft.com/office/drawing/2010/main">
-        <mc:Choice Requires="a14">
-          <p:sp>
-            <p:nvSpPr>
-              <p:cNvPr id="10" name="CuadroTexto 9">
-                <a:extLst>
-                  <a:ext uri="{FF2B5EF4-FFF2-40B4-BE49-F238E27FC236}">
-                    <a16:creationId xmlns:a16="http://schemas.microsoft.com/office/drawing/2014/main" id="{9320AF78-1FC6-19F4-8E0B-8A414F20C6DE}"/>
-                  </a:ext>
-                </a:extLst>
-              </p:cNvPr>
-              <p:cNvSpPr txBox="1"/>
-              <p:nvPr/>
-            </p:nvSpPr>
-            <p:spPr>
-              <a:xfrm>
-                <a:off x="6321421" y="2709096"/>
-                <a:ext cx="5486559" cy="1200329"/>
-              </a:xfrm>
-              <a:prstGeom prst="rect">
-                <a:avLst/>
-              </a:prstGeom>
-              <a:noFill/>
-            </p:spPr>
-            <p:txBody>
-              <a:bodyPr wrap="square" rtlCol="0">
-                <a:spAutoFit/>
-              </a:bodyPr>
-              <a:lstStyle/>
-              <a:p>
-                <a:pPr algn="ctr"/>
-                <a:r>
-                  <a:rPr lang="en-US" b="1" dirty="0"/>
-                  <a:t>shallow</a:t>
-                </a:r>
-                <a:r>
-                  <a:rPr lang="en-US" dirty="0"/>
-                  <a:t> waveguide</a:t>
-                </a:r>
-              </a:p>
-              <a:p>
-                <a:pPr algn="ctr"/>
-                <a:endParaRPr lang="en-US" dirty="0"/>
-              </a:p>
-              <a:p>
-                <a:pPr algn="ctr"/>
-                <a:r>
-                  <a:rPr lang="en-US" b="1" dirty="0"/>
-                  <a:t>neff_TE0 vs </a:t>
-                </a:r>
-                <a14:m>
-                  <m:oMath xmlns:m="http://schemas.openxmlformats.org/officeDocument/2006/math">
-                    <m:r>
-                      <a:rPr lang="es-ES" b="1" i="1">
-                        <a:latin typeface="Cambria Math" panose="02040503050406030204" pitchFamily="18" charset="0"/>
-                      </a:rPr>
-                      <m:t>𝝀</m:t>
-                    </m:r>
-                  </m:oMath>
-                </a14:m>
-                <a:r>
-                  <a:rPr lang="en-US" b="1" dirty="0"/>
-                  <a:t> </a:t>
-                </a:r>
-                <a:r>
-                  <a:rPr lang="en-US" dirty="0"/>
-                  <a:t>with the second-degree polynomial fit  </a:t>
-                </a:r>
-              </a:p>
-              <a:p>
-                <a:pPr algn="ctr"/>
-                <a:r>
-                  <a:rPr lang="en-US" dirty="0"/>
-                  <a:t>&amp; </a:t>
-                </a:r>
-                <a:r>
-                  <a:rPr lang="en-US" b="1" dirty="0"/>
-                  <a:t>neff_TM0 vs </a:t>
-                </a:r>
-                <a14:m>
-                  <m:oMath xmlns:m="http://schemas.openxmlformats.org/officeDocument/2006/math">
-                    <m:r>
-                      <a:rPr lang="es-ES" b="1" i="1">
-                        <a:latin typeface="Cambria Math" panose="02040503050406030204" pitchFamily="18" charset="0"/>
-                      </a:rPr>
-                      <m:t>𝝀</m:t>
-                    </m:r>
-                  </m:oMath>
-                </a14:m>
-                <a:r>
-                  <a:rPr lang="en-US" b="1" dirty="0"/>
-                  <a:t> </a:t>
-                </a:r>
-                <a:r>
-                  <a:rPr lang="en-US" dirty="0"/>
-                  <a:t>with the second-degree polynomial fit </a:t>
-                </a:r>
-              </a:p>
-            </p:txBody>
-          </p:sp>
-        </mc:Choice>
-        <mc:Fallback xmlns="">
-          <p:sp>
-            <p:nvSpPr>
-              <p:cNvPr id="10" name="CuadroTexto 9">
-                <a:extLst>
-                  <a:ext uri="{FF2B5EF4-FFF2-40B4-BE49-F238E27FC236}">
-                    <a16:creationId xmlns:a16="http://schemas.microsoft.com/office/drawing/2014/main" id="{9320AF78-1FC6-19F4-8E0B-8A414F20C6DE}"/>
-                  </a:ext>
-                </a:extLst>
-              </p:cNvPr>
-              <p:cNvSpPr txBox="1">
-                <a:spLocks noRot="1" noChangeAspect="1" noMove="1" noResize="1" noEditPoints="1" noAdjustHandles="1" noChangeArrowheads="1" noChangeShapeType="1" noTextEdit="1"/>
-              </p:cNvSpPr>
-              <p:nvPr/>
-            </p:nvSpPr>
-            <p:spPr>
-              <a:xfrm>
-                <a:off x="6321421" y="2709096"/>
-                <a:ext cx="5486559" cy="1200329"/>
-              </a:xfrm>
-              <a:prstGeom prst="rect">
-                <a:avLst/>
-              </a:prstGeom>
-              <a:blipFill>
-                <a:blip r:embed="rId8"/>
-                <a:stretch>
-                  <a:fillRect t="-2538" r="-556" b="-7107"/>
-                </a:stretch>
-              </a:blipFill>
-            </p:spPr>
-            <p:txBody>
-              <a:bodyPr/>
-              <a:lstStyle/>
-              <a:p>
-                <a:r>
-                  <a:rPr lang="es-ES">
-                    <a:noFill/>
-                  </a:rPr>
-                  <a:t> </a:t>
-                </a:r>
-              </a:p>
-            </p:txBody>
-          </p:sp>
-        </mc:Fallback>
-      </mc:AlternateContent>
       <p:sp>
         <p:nvSpPr>
           <p:cNvPr id="8" name="CuadroTexto 7">
@@ -7337,6 +6472,66 @@
           </a:p>
         </p:txBody>
       </p:sp>
+      <p:pic>
+        <p:nvPicPr>
+          <p:cNvPr id="7" name="Imagen 6">
+            <a:extLst>
+              <a:ext uri="{FF2B5EF4-FFF2-40B4-BE49-F238E27FC236}">
+                <a16:creationId xmlns:a16="http://schemas.microsoft.com/office/drawing/2014/main" id="{8307112D-2560-ADBC-C888-8B358810CD88}"/>
+              </a:ext>
+            </a:extLst>
+          </p:cNvPr>
+          <p:cNvPicPr>
+            <a:picLocks noChangeAspect="1"/>
+          </p:cNvPicPr>
+          <p:nvPr/>
+        </p:nvPicPr>
+        <p:blipFill>
+          <a:blip r:embed="rId5"/>
+          <a:stretch>
+            <a:fillRect/>
+          </a:stretch>
+        </p:blipFill>
+        <p:spPr>
+          <a:xfrm>
+            <a:off x="1295400" y="1635841"/>
+            <a:ext cx="3949016" cy="3085874"/>
+          </a:xfrm>
+          <a:prstGeom prst="rect">
+            <a:avLst/>
+          </a:prstGeom>
+        </p:spPr>
+      </p:pic>
+      <p:pic>
+        <p:nvPicPr>
+          <p:cNvPr id="12" name="Imagen 11">
+            <a:extLst>
+              <a:ext uri="{FF2B5EF4-FFF2-40B4-BE49-F238E27FC236}">
+                <a16:creationId xmlns:a16="http://schemas.microsoft.com/office/drawing/2014/main" id="{E9F268D6-542B-A11F-B67A-5D000D3AA727}"/>
+              </a:ext>
+            </a:extLst>
+          </p:cNvPr>
+          <p:cNvPicPr>
+            <a:picLocks noChangeAspect="1"/>
+          </p:cNvPicPr>
+          <p:nvPr/>
+        </p:nvPicPr>
+        <p:blipFill>
+          <a:blip r:embed="rId6"/>
+          <a:stretch>
+            <a:fillRect/>
+          </a:stretch>
+        </p:blipFill>
+        <p:spPr>
+          <a:xfrm>
+            <a:off x="6670158" y="1607770"/>
+            <a:ext cx="3821318" cy="2986087"/>
+          </a:xfrm>
+          <a:prstGeom prst="rect">
+            <a:avLst/>
+          </a:prstGeom>
+        </p:spPr>
+      </p:pic>
     </p:spTree>
     <p:extLst>
       <p:ext uri="{BB962C8B-B14F-4D97-AF65-F5344CB8AC3E}">
@@ -7555,7 +6750,7 @@
         <p:spPr>
           <a:xfrm>
             <a:off x="609441" y="4860334"/>
-            <a:ext cx="11199971" cy="1200329"/>
+            <a:ext cx="11199971" cy="1015663"/>
           </a:xfrm>
           <a:prstGeom prst="rect">
             <a:avLst/>
@@ -7579,43 +6774,9 @@
           <a:p>
             <a:pPr algn="just"/>
             <a:r>
-              <a:rPr lang="en-US" sz="1200" dirty="0">
-                <a:latin typeface="Arial" panose="020B0604020202020204" pitchFamily="34" charset="0"/>
-                <a:cs typeface="Arial" panose="020B0604020202020204" pitchFamily="34" charset="0"/>
-              </a:rPr>
-              <a:t>Comment results, which is the safe radius?, consider safe means less than 0.1 dB/90º.</a:t>
-            </a:r>
-          </a:p>
-          <a:p>
-            <a:pPr algn="just"/>
-            <a:endParaRPr lang="en-US" sz="1200" u="sng" dirty="0">
-              <a:latin typeface="Arial" panose="020B0604020202020204" pitchFamily="34" charset="0"/>
-              <a:cs typeface="Arial" panose="020B0604020202020204" pitchFamily="34" charset="0"/>
-            </a:endParaRPr>
-          </a:p>
-          <a:p>
-            <a:pPr algn="just"/>
-            <a:endParaRPr lang="en-US" sz="1200" dirty="0">
-              <a:latin typeface="Arial" panose="020B0604020202020204" pitchFamily="34" charset="0"/>
-              <a:cs typeface="Arial" panose="020B0604020202020204" pitchFamily="34" charset="0"/>
-            </a:endParaRPr>
-          </a:p>
-          <a:p>
-            <a:pPr algn="just"/>
-            <a:endParaRPr lang="en-US" sz="1200" dirty="0">
-              <a:latin typeface="Arial" panose="020B0604020202020204" pitchFamily="34" charset="0"/>
-              <a:cs typeface="Arial" panose="020B0604020202020204" pitchFamily="34" charset="0"/>
-            </a:endParaRPr>
-          </a:p>
-          <a:p>
-            <a:pPr algn="just"/>
-            <a:endParaRPr lang="en-US" sz="1200" dirty="0">
-              <a:latin typeface="Arial" panose="020B0604020202020204" pitchFamily="34" charset="0"/>
-              <a:cs typeface="Arial" panose="020B0604020202020204" pitchFamily="34" charset="0"/>
-            </a:endParaRPr>
-          </a:p>
-          <a:p>
-            <a:pPr algn="just"/>
+              <a:rPr lang="en-US" sz="1200" dirty="0"/>
+              <a:t>The bend loss decreases sharply as the bend radius increases. For small radii, especially around 25–50 µm, the total loss is significantly higher because radiation loss is dominant. As the radius increases, mode loss decreases rapidly, while propagation loss increases slightly, resulting in a minimum, then a gradual increase in total loss. According to the graph, the total loss is clearly below 0.1 dB/90º from about 50 µm onward, so this can be considered a safe bend radius. A radius of 75 µm or more would be a more conservative design choice because it provides lower loss and more stable behavior. The neff_TE0 also decreases slightly with increasing bend radius and then tends to stabilize, which indicates that curvature has a stronger effect at small radii and becomes negligible for large-radius bends.</a:t>
+            </a:r>
             <a:endParaRPr lang="en-US" sz="1200" dirty="0">
               <a:latin typeface="Arial" panose="020B0604020202020204" pitchFamily="34" charset="0"/>
               <a:cs typeface="Arial" panose="020B0604020202020204" pitchFamily="34" charset="0"/>
@@ -7675,57 +6836,66 @@
           </a:p>
         </p:txBody>
       </p:sp>
-      <p:sp>
-        <p:nvSpPr>
-          <p:cNvPr id="8" name="CuadroTexto 7">
-            <a:extLst>
-              <a:ext uri="{FF2B5EF4-FFF2-40B4-BE49-F238E27FC236}">
-                <a16:creationId xmlns:a16="http://schemas.microsoft.com/office/drawing/2014/main" id="{331EBD86-BA6C-68C9-2D38-FC8CFBA7ADC4}"/>
-              </a:ext>
-            </a:extLst>
-          </p:cNvPr>
-          <p:cNvSpPr txBox="1"/>
+      <p:pic>
+        <p:nvPicPr>
+          <p:cNvPr id="5" name="Imagen 4">
+            <a:extLst>
+              <a:ext uri="{FF2B5EF4-FFF2-40B4-BE49-F238E27FC236}">
+                <a16:creationId xmlns:a16="http://schemas.microsoft.com/office/drawing/2014/main" id="{FDCC138F-0E01-FB8C-A0CA-0CD37243FE56}"/>
+              </a:ext>
+            </a:extLst>
+          </p:cNvPr>
+          <p:cNvPicPr>
+            <a:picLocks noChangeAspect="1"/>
+          </p:cNvPicPr>
           <p:nvPr/>
-        </p:nvSpPr>
-        <p:spPr>
-          <a:xfrm>
-            <a:off x="2978141" y="2784355"/>
-            <a:ext cx="6235717" cy="923330"/>
+        </p:nvPicPr>
+        <p:blipFill>
+          <a:blip r:embed="rId5"/>
+          <a:stretch>
+            <a:fillRect/>
+          </a:stretch>
+        </p:blipFill>
+        <p:spPr>
+          <a:xfrm>
+            <a:off x="1752600" y="1525506"/>
+            <a:ext cx="3884156" cy="3068213"/>
           </a:xfrm>
           <a:prstGeom prst="rect">
             <a:avLst/>
           </a:prstGeom>
-          <a:noFill/>
-        </p:spPr>
-        <p:txBody>
-          <a:bodyPr wrap="square" rtlCol="0">
-            <a:spAutoFit/>
-          </a:bodyPr>
-          <a:lstStyle/>
-          <a:p>
-            <a:pPr algn="ctr"/>
-            <a:r>
-              <a:rPr lang="en-US" b="1" dirty="0"/>
-              <a:t>deep</a:t>
-            </a:r>
-            <a:r>
-              <a:rPr lang="en-US" dirty="0"/>
-              <a:t> waveguide</a:t>
-            </a:r>
-          </a:p>
-          <a:p>
-            <a:pPr algn="ctr"/>
-            <a:endParaRPr lang="en-US" dirty="0"/>
-          </a:p>
-          <a:p>
-            <a:pPr algn="ctr"/>
-            <a:r>
-              <a:rPr lang="en-US" dirty="0"/>
-              <a:t>Paste Total Loss (dB/90º) vs R &amp; neff_TE0 vs R</a:t>
-            </a:r>
-          </a:p>
-        </p:txBody>
-      </p:sp>
+        </p:spPr>
+      </p:pic>
+      <p:pic>
+        <p:nvPicPr>
+          <p:cNvPr id="9" name="Imagen 8">
+            <a:extLst>
+              <a:ext uri="{FF2B5EF4-FFF2-40B4-BE49-F238E27FC236}">
+                <a16:creationId xmlns:a16="http://schemas.microsoft.com/office/drawing/2014/main" id="{85F46F58-A989-08EF-DDD6-0133CBD22EFF}"/>
+              </a:ext>
+            </a:extLst>
+          </p:cNvPr>
+          <p:cNvPicPr>
+            <a:picLocks noChangeAspect="1"/>
+          </p:cNvPicPr>
+          <p:nvPr/>
+        </p:nvPicPr>
+        <p:blipFill>
+          <a:blip r:embed="rId6"/>
+          <a:stretch>
+            <a:fillRect/>
+          </a:stretch>
+        </p:blipFill>
+        <p:spPr>
+          <a:xfrm>
+            <a:off x="6456639" y="1610481"/>
+            <a:ext cx="4515170" cy="2955613"/>
+          </a:xfrm>
+          <a:prstGeom prst="rect">
+            <a:avLst/>
+          </a:prstGeom>
+        </p:spPr>
+      </p:pic>
     </p:spTree>
     <p:extLst>
       <p:ext uri="{BB962C8B-B14F-4D97-AF65-F5344CB8AC3E}">
